--- a/05_development/youtube/_shared/template-slides.pptx
+++ b/05_development/youtube/_shared/template-slides.pptx
@@ -3176,7 +3176,7 @@
         <p:spPr>
           <a:xfrm>
             <a:off x="0" y="914400"/>
-            <a:ext cx="12191695" cy="548640"/>
+            <a:ext cx="12191695" cy="9144"/>
           </a:xfrm>
           <a:prstGeom prst="rect">
             <a:avLst/>
@@ -3195,7 +3195,7 @@
                 </a:solidFill>
                 <a:latin typeface="Yu Gothic"/>
               </a:rPr>
-              <a:t>【実例あり】</a:t>
+              <a:t/>
             </a:r>
           </a:p>
         </p:txBody>
@@ -3208,8 +3208,8 @@
         </p:nvSpPr>
         <p:spPr>
           <a:xfrm>
-            <a:off x="0" y="1645920"/>
-            <a:ext cx="12191695" cy="1645920"/>
+            <a:off x="0" y="1097280"/>
+            <a:ext cx="12191695" cy="2331720"/>
           </a:xfrm>
           <a:prstGeom prst="rect">
             <a:avLst/>
@@ -3253,7 +3253,7 @@
         </p:nvSpPr>
         <p:spPr>
           <a:xfrm>
-            <a:off x="5029200" y="3474720"/>
+            <a:off x="5029200" y="4160520"/>
             <a:ext cx="2133295" cy="54864"/>
           </a:xfrm>
           <a:prstGeom prst="rect">
@@ -3296,7 +3296,7 @@
         </p:nvSpPr>
         <p:spPr>
           <a:xfrm>
-            <a:off x="0" y="3840480"/>
+            <a:off x="0" y="3749039"/>
             <a:ext cx="12191695" cy="457200"/>
           </a:xfrm>
           <a:prstGeom prst="rect">
@@ -3329,7 +3329,7 @@
         </p:nvSpPr>
         <p:spPr>
           <a:xfrm>
-            <a:off x="2286000" y="4480560"/>
+            <a:off x="2286000" y="4434840"/>
             <a:ext cx="7619695" cy="1371600"/>
           </a:xfrm>
           <a:prstGeom prst="rect">
@@ -8637,7 +8637,7 @@
           <a:p>
             <a:pPr algn="ctr"/>
             <a:r>
-              <a:rPr lang="ja-JP" sz="2400" b="0">
+              <a:rPr lang="ja-JP" sz="3200" b="1">
                 <a:solidFill>
                   <a:srgbClr val="FFFFFF"/>
                 </a:solidFill>
@@ -8650,7 +8650,7 @@
           <a:p>
             <a:pPr algn="ctr"/>
             <a:r>
-              <a:rPr lang="ja-JP" sz="2400" b="0">
+              <a:rPr lang="ja-JP" sz="3200" b="1">
                 <a:solidFill>
                   <a:srgbClr val="FFFFFF"/>
                 </a:solidFill>
@@ -8663,7 +8663,7 @@
           <a:p>
             <a:pPr algn="ctr"/>
             <a:r>
-              <a:rPr lang="ja-JP" sz="2400" b="0">
+              <a:rPr lang="ja-JP" sz="3200" b="1">
                 <a:solidFill>
                   <a:srgbClr val="FFFFFF"/>
                 </a:solidFill>
@@ -8676,7 +8676,7 @@
           <a:p>
             <a:pPr algn="ctr"/>
             <a:r>
-              <a:rPr lang="ja-JP" sz="2400" b="0">
+              <a:rPr lang="ja-JP" sz="3200" b="1">
                 <a:solidFill>
                   <a:srgbClr val="FFFFFF"/>
                 </a:solidFill>
@@ -15121,7 +15121,7 @@
           <a:p>
             <a:pPr algn="ctr"/>
             <a:r>
-              <a:rPr lang="ja-JP" sz="2400" b="0">
+              <a:rPr lang="ja-JP" sz="3200" b="1">
                 <a:solidFill>
                   <a:srgbClr val="FFFFFF"/>
                 </a:solidFill>
@@ -15134,7 +15134,7 @@
           <a:p>
             <a:pPr algn="ctr"/>
             <a:r>
-              <a:rPr lang="ja-JP" sz="2400" b="0">
+              <a:rPr lang="ja-JP" sz="3200" b="1">
                 <a:solidFill>
                   <a:srgbClr val="FFFFFF"/>
                 </a:solidFill>
@@ -15147,7 +15147,7 @@
           <a:p>
             <a:pPr algn="ctr"/>
             <a:r>
-              <a:rPr lang="ja-JP" sz="2400" b="0">
+              <a:rPr lang="ja-JP" sz="3200" b="1">
                 <a:solidFill>
                   <a:srgbClr val="FFFFFF"/>
                 </a:solidFill>
@@ -15160,7 +15160,7 @@
           <a:p>
             <a:pPr algn="ctr"/>
             <a:r>
-              <a:rPr lang="ja-JP" sz="2400" b="0">
+              <a:rPr lang="ja-JP" sz="3200" b="1">
                 <a:solidFill>
                   <a:srgbClr val="FFFFFF"/>
                 </a:solidFill>
@@ -15173,7 +15173,7 @@
           <a:p>
             <a:pPr algn="ctr"/>
             <a:r>
-              <a:rPr lang="ja-JP" sz="2400" b="0">
+              <a:rPr lang="ja-JP" sz="3200" b="1">
                 <a:solidFill>
                   <a:srgbClr val="FFFFFF"/>
                 </a:solidFill>
